--- a/tests/OfficeAgent.Tests/Corpus/v1.0.0/native/outputs/p-comment.pptx
+++ b/tests/OfficeAgent.Tests/Corpus/v1.0.0/native/outputs/p-comment.pptx
@@ -2,11 +2,11 @@
 <file path=ppt/presentation.xml><?xml version="1.0" encoding="utf-8"?>
 <p:presentation xmlns:r="http://schemas.openxmlformats.org/officeDocument/2006/relationships" xmlns:p="http://schemas.openxmlformats.org/presentationml/2006/main">
   <p:sldMasterIdLst>
-    <p:sldMasterId xmlns:r="http://schemas.openxmlformats.org/officeDocument/2006/relationships" id="2147483648" r:id="R82dda8003dad4ebc"/>
+    <p:sldMasterId xmlns:r="http://schemas.openxmlformats.org/officeDocument/2006/relationships" id="2147483648" r:id="R0a8c5867be414535"/>
   </p:sldMasterIdLst>
   <p:sldIdLst>
-    <p:sldId xmlns:r="http://schemas.openxmlformats.org/officeDocument/2006/relationships" id="256" r:id="R136a454b2bf6418c"/>
-    <p:sldId xmlns:r="http://schemas.openxmlformats.org/officeDocument/2006/relationships" id="257" r:id="Rb5897c0c6d8d48ce"/>
+    <p:sldId xmlns:r="http://schemas.openxmlformats.org/officeDocument/2006/relationships" id="256" r:id="Redc3c19bdbd44bd0"/>
+    <p:sldId xmlns:r="http://schemas.openxmlformats.org/officeDocument/2006/relationships" id="257" r:id="Re09f591a9e4e40cb"/>
   </p:sldIdLst>
   <p:sldSz cx="12192000" cy="6858000"/>
   <p:notesSz cx="6858000" cy="9144000"/>
@@ -15,13 +15,13 @@
 
 <file path=ppt/authors.xml><?xml version="1.0" encoding="utf-8"?>
 <p188:authorLst xmlns:p188="http://schemas.microsoft.com/office/powerpoint/2018/8/main">
-  <p188:author id="{47679487-AC30-422B-9BA2-83C28E99F429}" name="Reviewer" initials="OA" userId="Reviewer" providerId="None"/>
+  <p188:author id="{36840C79-A371-41EF-B015-A34A14CD3BA5}" name="Reviewer" initials="OA" userId="Reviewer" providerId="None"/>
 </p188:authorLst>
 </file>
 
 <file path=ppt/comments/modernComment.xml><?xml version="1.0" encoding="utf-8"?>
 <p188:cmLst xmlns:p188="http://schemas.microsoft.com/office/powerpoint/2018/8/main">
-  <p188:cm id="{150079C9-840E-41E0-AFBE-A8E63BCB8AB6}" authorId="{47679487-AC30-422B-9BA2-83C28E99F429}" created="2026-09-22T11:15:06.3081849Z">
+  <p188:cm id="{9952965B-3D71-4424-AE28-528FE29AE1A2}" authorId="{36840C79-A371-41EF-B015-A34A14CD3BA5}" created="2026-09-22T19:12:25.1646302Z">
     <pc:sldMkLst xmlns:pc="http://schemas.microsoft.com/office/powerpoint/2013/main/command">
       <pc:docMk/>
       <pc:sldMk cId="0" sldId="256"/>
@@ -108,7 +108,7 @@
   </p:cSld>
   <p:clrMap bg1="lt1" tx1="dk1" bg2="lt2" tx2="dk2" accent1="accent1" accent2="accent2" accent3="accent3" accent4="accent4" accent5="accent5" accent6="accent6" hlink="hlink" folHlink="folHlink"/>
   <p:sldLayoutIdLst>
-    <p:sldLayoutId xmlns:r="http://schemas.openxmlformats.org/officeDocument/2006/relationships" id="2147483649" r:id="R8116027d2a1249ab"/>
+    <p:sldLayoutId xmlns:r="http://schemas.openxmlformats.org/officeDocument/2006/relationships" id="2147483649" r:id="R10d4a3bdf80b4556"/>
   </p:sldLayoutIdLst>
 </p:sldMaster>
 </file>

--- a/tests/OfficeAgent.Tests/Corpus/v1.0.0/native/outputs/p-comment.pptx
+++ b/tests/OfficeAgent.Tests/Corpus/v1.0.0/native/outputs/p-comment.pptx
@@ -2,11 +2,11 @@
 <file path=ppt/presentation.xml><?xml version="1.0" encoding="utf-8"?>
 <p:presentation xmlns:r="http://schemas.openxmlformats.org/officeDocument/2006/relationships" xmlns:p="http://schemas.openxmlformats.org/presentationml/2006/main">
   <p:sldMasterIdLst>
-    <p:sldMasterId xmlns:r="http://schemas.openxmlformats.org/officeDocument/2006/relationships" id="2147483648" r:id="R0a8c5867be414535"/>
+    <p:sldMasterId xmlns:r="http://schemas.openxmlformats.org/officeDocument/2006/relationships" id="2147483648" r:id="Rc61e8050960d43a3"/>
   </p:sldMasterIdLst>
   <p:sldIdLst>
-    <p:sldId xmlns:r="http://schemas.openxmlformats.org/officeDocument/2006/relationships" id="256" r:id="Redc3c19bdbd44bd0"/>
-    <p:sldId xmlns:r="http://schemas.openxmlformats.org/officeDocument/2006/relationships" id="257" r:id="Re09f591a9e4e40cb"/>
+    <p:sldId xmlns:r="http://schemas.openxmlformats.org/officeDocument/2006/relationships" id="256" r:id="R38fe1680ffa34d21"/>
+    <p:sldId xmlns:r="http://schemas.openxmlformats.org/officeDocument/2006/relationships" id="257" r:id="Rdb85e52a643449eb"/>
   </p:sldIdLst>
   <p:sldSz cx="12192000" cy="6858000"/>
   <p:notesSz cx="6858000" cy="9144000"/>
@@ -15,13 +15,13 @@
 
 <file path=ppt/authors.xml><?xml version="1.0" encoding="utf-8"?>
 <p188:authorLst xmlns:p188="http://schemas.microsoft.com/office/powerpoint/2018/8/main">
-  <p188:author id="{36840C79-A371-41EF-B015-A34A14CD3BA5}" name="Reviewer" initials="OA" userId="Reviewer" providerId="None"/>
+  <p188:author id="{E8883C44-7295-4A94-9166-944D6F4BADF0}" name="Reviewer" initials="OA" userId="Reviewer" providerId="None"/>
 </p188:authorLst>
 </file>
 
 <file path=ppt/comments/modernComment.xml><?xml version="1.0" encoding="utf-8"?>
 <p188:cmLst xmlns:p188="http://schemas.microsoft.com/office/powerpoint/2018/8/main">
-  <p188:cm id="{9952965B-3D71-4424-AE28-528FE29AE1A2}" authorId="{36840C79-A371-41EF-B015-A34A14CD3BA5}" created="2026-09-22T19:12:25.1646302Z">
+  <p188:cm id="{89848EF0-A576-4A32-91F7-E1B36673394A}" authorId="{E8883C44-7295-4A94-9166-944D6F4BADF0}" created="2026-10-08T14:50:19.9537208Z">
     <pc:sldMkLst xmlns:pc="http://schemas.microsoft.com/office/powerpoint/2013/main/command">
       <pc:docMk/>
       <pc:sldMk cId="0" sldId="256"/>
@@ -108,7 +108,7 @@
   </p:cSld>
   <p:clrMap bg1="lt1" tx1="dk1" bg2="lt2" tx2="dk2" accent1="accent1" accent2="accent2" accent3="accent3" accent4="accent4" accent5="accent5" accent6="accent6" hlink="hlink" folHlink="folHlink"/>
   <p:sldLayoutIdLst>
-    <p:sldLayoutId xmlns:r="http://schemas.openxmlformats.org/officeDocument/2006/relationships" id="2147483649" r:id="R10d4a3bdf80b4556"/>
+    <p:sldLayoutId xmlns:r="http://schemas.openxmlformats.org/officeDocument/2006/relationships" id="2147483649" r:id="Rfc8ca5f3f58e4370"/>
   </p:sldLayoutIdLst>
 </p:sldMaster>
 </file>

--- a/tests/OfficeAgent.Tests/Corpus/v1.0.0/native/outputs/p-comment.pptx
+++ b/tests/OfficeAgent.Tests/Corpus/v1.0.0/native/outputs/p-comment.pptx
@@ -2,11 +2,11 @@
 <file path=ppt/presentation.xml><?xml version="1.0" encoding="utf-8"?>
 <p:presentation xmlns:r="http://schemas.openxmlformats.org/officeDocument/2006/relationships" xmlns:p="http://schemas.openxmlformats.org/presentationml/2006/main">
   <p:sldMasterIdLst>
-    <p:sldMasterId xmlns:r="http://schemas.openxmlformats.org/officeDocument/2006/relationships" id="2147483648" r:id="Rc61e8050960d43a3"/>
+    <p:sldMasterId xmlns:r="http://schemas.openxmlformats.org/officeDocument/2006/relationships" id="2147483648" r:id="R89ea42d7792f4fce"/>
   </p:sldMasterIdLst>
   <p:sldIdLst>
-    <p:sldId xmlns:r="http://schemas.openxmlformats.org/officeDocument/2006/relationships" id="256" r:id="R38fe1680ffa34d21"/>
-    <p:sldId xmlns:r="http://schemas.openxmlformats.org/officeDocument/2006/relationships" id="257" r:id="Rdb85e52a643449eb"/>
+    <p:sldId xmlns:r="http://schemas.openxmlformats.org/officeDocument/2006/relationships" id="256" r:id="Re8f8b33240c44f82"/>
+    <p:sldId xmlns:r="http://schemas.openxmlformats.org/officeDocument/2006/relationships" id="257" r:id="Rd845e2983dac4c97"/>
   </p:sldIdLst>
   <p:sldSz cx="12192000" cy="6858000"/>
   <p:notesSz cx="6858000" cy="9144000"/>
@@ -15,13 +15,13 @@
 
 <file path=ppt/authors.xml><?xml version="1.0" encoding="utf-8"?>
 <p188:authorLst xmlns:p188="http://schemas.microsoft.com/office/powerpoint/2018/8/main">
-  <p188:author id="{E8883C44-7295-4A94-9166-944D6F4BADF0}" name="Reviewer" initials="OA" userId="Reviewer" providerId="None"/>
+  <p188:author id="{6F31254E-7EB9-4822-B37F-39D08800AF7A}" name="Reviewer" initials="OA" userId="Reviewer" providerId="None"/>
 </p188:authorLst>
 </file>
 
 <file path=ppt/comments/modernComment.xml><?xml version="1.0" encoding="utf-8"?>
 <p188:cmLst xmlns:p188="http://schemas.microsoft.com/office/powerpoint/2018/8/main">
-  <p188:cm id="{89848EF0-A576-4A32-91F7-E1B36673394A}" authorId="{E8883C44-7295-4A94-9166-944D6F4BADF0}" created="2026-10-08T14:50:19.9537208Z">
+  <p188:cm id="{FDD6AD9A-C97C-4549-A446-F4F478A754DE}" authorId="{6F31254E-7EB9-4822-B37F-39D08800AF7A}" created="2026-10-23T06:51:36.5627783Z">
     <pc:sldMkLst xmlns:pc="http://schemas.microsoft.com/office/powerpoint/2013/main/command">
       <pc:docMk/>
       <pc:sldMk cId="0" sldId="256"/>
@@ -108,7 +108,7 @@
   </p:cSld>
   <p:clrMap bg1="lt1" tx1="dk1" bg2="lt2" tx2="dk2" accent1="accent1" accent2="accent2" accent3="accent3" accent4="accent4" accent5="accent5" accent6="accent6" hlink="hlink" folHlink="folHlink"/>
   <p:sldLayoutIdLst>
-    <p:sldLayoutId xmlns:r="http://schemas.openxmlformats.org/officeDocument/2006/relationships" id="2147483649" r:id="Rfc8ca5f3f58e4370"/>
+    <p:sldLayoutId xmlns:r="http://schemas.openxmlformats.org/officeDocument/2006/relationships" id="2147483649" r:id="R96b2a673ac9a49f7"/>
   </p:sldLayoutIdLst>
 </p:sldMaster>
 </file>

--- a/tests/OfficeAgent.Tests/Corpus/v1.0.0/native/outputs/p-comment.pptx
+++ b/tests/OfficeAgent.Tests/Corpus/v1.0.0/native/outputs/p-comment.pptx
@@ -2,11 +2,11 @@
 <file path=ppt/presentation.xml><?xml version="1.0" encoding="utf-8"?>
 <p:presentation xmlns:r="http://schemas.openxmlformats.org/officeDocument/2006/relationships" xmlns:p="http://schemas.openxmlformats.org/presentationml/2006/main">
   <p:sldMasterIdLst>
-    <p:sldMasterId xmlns:r="http://schemas.openxmlformats.org/officeDocument/2006/relationships" id="2147483648" r:id="R89ea42d7792f4fce"/>
+    <p:sldMasterId xmlns:r="http://schemas.openxmlformats.org/officeDocument/2006/relationships" id="2147483648" r:id="R948e00f483bb433e"/>
   </p:sldMasterIdLst>
   <p:sldIdLst>
-    <p:sldId xmlns:r="http://schemas.openxmlformats.org/officeDocument/2006/relationships" id="256" r:id="Re8f8b33240c44f82"/>
-    <p:sldId xmlns:r="http://schemas.openxmlformats.org/officeDocument/2006/relationships" id="257" r:id="Rd845e2983dac4c97"/>
+    <p:sldId xmlns:r="http://schemas.openxmlformats.org/officeDocument/2006/relationships" id="256" r:id="R87d02d1b8a45462b"/>
+    <p:sldId xmlns:r="http://schemas.openxmlformats.org/officeDocument/2006/relationships" id="257" r:id="Ra7f229672bfa47fe"/>
   </p:sldIdLst>
   <p:sldSz cx="12192000" cy="6858000"/>
   <p:notesSz cx="6858000" cy="9144000"/>
@@ -15,13 +15,13 @@
 
 <file path=ppt/authors.xml><?xml version="1.0" encoding="utf-8"?>
 <p188:authorLst xmlns:p188="http://schemas.microsoft.com/office/powerpoint/2018/8/main">
-  <p188:author id="{6F31254E-7EB9-4822-B37F-39D08800AF7A}" name="Reviewer" initials="OA" userId="Reviewer" providerId="None"/>
+  <p188:author id="{4D561A37-A375-444F-9FC3-64E9E70EADC1}" name="Reviewer" initials="OA" userId="Reviewer" providerId="None"/>
 </p188:authorLst>
 </file>
 
 <file path=ppt/comments/modernComment.xml><?xml version="1.0" encoding="utf-8"?>
 <p188:cmLst xmlns:p188="http://schemas.microsoft.com/office/powerpoint/2018/8/main">
-  <p188:cm id="{FDD6AD9A-C97C-4549-A446-F4F478A754DE}" authorId="{6F31254E-7EB9-4822-B37F-39D08800AF7A}" created="2026-10-23T06:51:36.5627783Z">
+  <p188:cm id="{8C516FD1-AE5D-42DE-84D2-4075E0CBDD75}" authorId="{4D561A37-A375-444F-9FC3-64E9E70EADC1}" created="2026-10-24T20:31:31.8062565Z">
     <pc:sldMkLst xmlns:pc="http://schemas.microsoft.com/office/powerpoint/2013/main/command">
       <pc:docMk/>
       <pc:sldMk cId="0" sldId="256"/>
@@ -108,7 +108,7 @@
   </p:cSld>
   <p:clrMap bg1="lt1" tx1="dk1" bg2="lt2" tx2="dk2" accent1="accent1" accent2="accent2" accent3="accent3" accent4="accent4" accent5="accent5" accent6="accent6" hlink="hlink" folHlink="folHlink"/>
   <p:sldLayoutIdLst>
-    <p:sldLayoutId xmlns:r="http://schemas.openxmlformats.org/officeDocument/2006/relationships" id="2147483649" r:id="R96b2a673ac9a49f7"/>
+    <p:sldLayoutId xmlns:r="http://schemas.openxmlformats.org/officeDocument/2006/relationships" id="2147483649" r:id="Re4a9c208ec184fd4"/>
   </p:sldLayoutIdLst>
 </p:sldMaster>
 </file>

--- a/tests/OfficeAgent.Tests/Corpus/v1.0.0/native/outputs/p-comment.pptx
+++ b/tests/OfficeAgent.Tests/Corpus/v1.0.0/native/outputs/p-comment.pptx
@@ -2,11 +2,11 @@
 <file path=ppt/presentation.xml><?xml version="1.0" encoding="utf-8"?>
 <p:presentation xmlns:r="http://schemas.openxmlformats.org/officeDocument/2006/relationships" xmlns:p="http://schemas.openxmlformats.org/presentationml/2006/main">
   <p:sldMasterIdLst>
-    <p:sldMasterId xmlns:r="http://schemas.openxmlformats.org/officeDocument/2006/relationships" id="2147483648" r:id="R948e00f483bb433e"/>
+    <p:sldMasterId xmlns:r="http://schemas.openxmlformats.org/officeDocument/2006/relationships" id="2147483648" r:id="R77e8bad93ab34fb4"/>
   </p:sldMasterIdLst>
   <p:sldIdLst>
-    <p:sldId xmlns:r="http://schemas.openxmlformats.org/officeDocument/2006/relationships" id="256" r:id="R87d02d1b8a45462b"/>
-    <p:sldId xmlns:r="http://schemas.openxmlformats.org/officeDocument/2006/relationships" id="257" r:id="Ra7f229672bfa47fe"/>
+    <p:sldId xmlns:r="http://schemas.openxmlformats.org/officeDocument/2006/relationships" id="256" r:id="R5980bd5c968a4229"/>
+    <p:sldId xmlns:r="http://schemas.openxmlformats.org/officeDocument/2006/relationships" id="257" r:id="R1a759961f97e4695"/>
   </p:sldIdLst>
   <p:sldSz cx="12192000" cy="6858000"/>
   <p:notesSz cx="6858000" cy="9144000"/>
@@ -15,13 +15,13 @@
 
 <file path=ppt/authors.xml><?xml version="1.0" encoding="utf-8"?>
 <p188:authorLst xmlns:p188="http://schemas.microsoft.com/office/powerpoint/2018/8/main">
-  <p188:author id="{4D561A37-A375-444F-9FC3-64E9E70EADC1}" name="Reviewer" initials="OA" userId="Reviewer" providerId="None"/>
+  <p188:author id="{925F6CEB-86DF-48E4-83CE-C4B3B357823D}" name="Reviewer" initials="OA" userId="Reviewer" providerId="None"/>
 </p188:authorLst>
 </file>
 
 <file path=ppt/comments/modernComment.xml><?xml version="1.0" encoding="utf-8"?>
 <p188:cmLst xmlns:p188="http://schemas.microsoft.com/office/powerpoint/2018/8/main">
-  <p188:cm id="{8C516FD1-AE5D-42DE-84D2-4075E0CBDD75}" authorId="{4D561A37-A375-444F-9FC3-64E9E70EADC1}" created="2026-10-24T20:31:31.8062565Z">
+  <p188:cm id="{26E836A6-ED72-4FC8-B4DF-BF9C1EC52C57}" authorId="{925F6CEB-86DF-48E4-83CE-C4B3B357823D}" created="2026-10-28T09:42:34.393892Z">
     <pc:sldMkLst xmlns:pc="http://schemas.microsoft.com/office/powerpoint/2013/main/command">
       <pc:docMk/>
       <pc:sldMk cId="0" sldId="256"/>
@@ -77,7 +77,7 @@
 </file>
 
 <file path=ppt/slideLayouts/slideLayout1.xml><?xml version="1.0" encoding="utf-8"?>
-<p:sldLayout xmlns:p="http://schemas.openxmlformats.org/presentationml/2006/main" type="title">
+<p:sldLayout xmlns:a="http://schemas.openxmlformats.org/drawingml/2006/main" xmlns:p="http://schemas.openxmlformats.org/presentationml/2006/main" type="title">
   <p:cSld>
     <p:spTree>
       <p:nvGrpSpPr>
@@ -95,7 +95,7 @@
 </file>
 
 <file path=ppt/slideMasters/slideMaster1.xml><?xml version="1.0" encoding="utf-8"?>
-<p:sldMaster xmlns:p="http://schemas.openxmlformats.org/presentationml/2006/main">
+<p:sldMaster xmlns:r="http://schemas.openxmlformats.org/officeDocument/2006/relationships" xmlns:p="http://schemas.openxmlformats.org/presentationml/2006/main">
   <p:cSld>
     <p:spTree>
       <p:nvGrpSpPr>
@@ -108,7 +108,7 @@
   </p:cSld>
   <p:clrMap bg1="lt1" tx1="dk1" bg2="lt2" tx2="dk2" accent1="accent1" accent2="accent2" accent3="accent3" accent4="accent4" accent5="accent5" accent6="accent6" hlink="hlink" folHlink="folHlink"/>
   <p:sldLayoutIdLst>
-    <p:sldLayoutId xmlns:r="http://schemas.openxmlformats.org/officeDocument/2006/relationships" id="2147483649" r:id="Re4a9c208ec184fd4"/>
+    <p:sldLayoutId xmlns:r="http://schemas.openxmlformats.org/officeDocument/2006/relationships" id="2147483649" r:id="R5808e1b6be4345d1"/>
   </p:sldLayoutIdLst>
 </p:sldMaster>
 </file>
